--- a/curriculum/M01/W10/L02/slides.pptx
+++ b/curriculum/M01/W10/L02/slides.pptx
@@ -4948,11 +4948,40 @@
                 <a:ea typeface="Malgun Gothic"/>
                 <a:cs typeface="Malgun Gothic"/>
               </a:rPr>
-              <a:t>: 단량체 몇 개가 모여 안정한 씨를 만드는 단계다. 느리고 불리하므로 잠복기가 생긴다. 2. </a:t>
-            </a:r>
+              <a:t>: 단량체 몇 개가 모여 안정한 씨를 만드는 단계다. 느리고 불리하므로 잠복기가 생긴다.</a:t>
+            </a:r>
+          </a:p>
+          <a:p>
+            <a:pPr>
+              <a:spcAft>
+                <a:spcPts val="900"/>
+              </a:spcAft>
+            </a:pPr>
             <a:r>
               <a:rPr sz="1400" b="1" i="0">
                 <a:solidFill>
+                  <a:srgbClr val="F2B705"/>
+                </a:solidFill>
+                <a:latin typeface="Malgun Gothic"/>
+                <a:ea typeface="Malgun Gothic"/>
+                <a:cs typeface="Malgun Gothic"/>
+              </a:rPr>
+              <a:t>•  </a:t>
+            </a:r>
+            <a:r>
+              <a:rPr sz="1400" b="0" i="0">
+                <a:solidFill>
+                  <a:srgbClr val="11202B"/>
+                </a:solidFill>
+                <a:latin typeface="Malgun Gothic"/>
+                <a:ea typeface="Malgun Gothic"/>
+                <a:cs typeface="Malgun Gothic"/>
+              </a:rPr>
+              <a:t>2. </a:t>
+            </a:r>
+            <a:r>
+              <a:rPr sz="1400" b="1" i="0">
+                <a:solidFill>
                   <a:srgbClr val="11202B"/>
                 </a:solidFill>
                 <a:latin typeface="Malgun Gothic"/>
@@ -4970,7 +4999,36 @@
                 <a:ea typeface="Malgun Gothic"/>
                 <a:cs typeface="Malgun Gothic"/>
               </a:rPr>
-              <a:t>: 씨의 양 끝에 단량체가 붙어 빠르게 길어진다. 3. </a:t>
+              <a:t>: 씨의 양 끝에 단량체가 붙어 빠르게 길어진다.</a:t>
+            </a:r>
+          </a:p>
+          <a:p>
+            <a:pPr>
+              <a:spcAft>
+                <a:spcPts val="900"/>
+              </a:spcAft>
+            </a:pPr>
+            <a:r>
+              <a:rPr sz="1400" b="1" i="0">
+                <a:solidFill>
+                  <a:srgbClr val="F2B705"/>
+                </a:solidFill>
+                <a:latin typeface="Malgun Gothic"/>
+                <a:ea typeface="Malgun Gothic"/>
+                <a:cs typeface="Malgun Gothic"/>
+              </a:rPr>
+              <a:t>•  </a:t>
+            </a:r>
+            <a:r>
+              <a:rPr sz="1400" b="0" i="0">
+                <a:solidFill>
+                  <a:srgbClr val="11202B"/>
+                </a:solidFill>
+                <a:latin typeface="Malgun Gothic"/>
+                <a:ea typeface="Malgun Gothic"/>
+                <a:cs typeface="Malgun Gothic"/>
+              </a:rPr>
+              <a:t>3. </a:t>
             </a:r>
             <a:r>
               <a:rPr sz="1400" b="1" i="0">
@@ -8100,11 +8158,40 @@
                 <a:ea typeface="Malgun Gothic"/>
                 <a:cs typeface="Malgun Gothic"/>
               </a:rPr>
-              <a:t>: ADP와 Pᵢ가 떨어진 myosin 머리가 actin에 강하게 붙는다. 2. </a:t>
-            </a:r>
+              <a:t>: ADP와 Pᵢ가 떨어진 myosin 머리가 actin에 강하게 붙는다.</a:t>
+            </a:r>
+          </a:p>
+          <a:p>
+            <a:pPr>
+              <a:spcAft>
+                <a:spcPts val="900"/>
+              </a:spcAft>
+            </a:pPr>
             <a:r>
               <a:rPr sz="1400" b="1" i="0">
                 <a:solidFill>
+                  <a:srgbClr val="F2B705"/>
+                </a:solidFill>
+                <a:latin typeface="Malgun Gothic"/>
+                <a:ea typeface="Malgun Gothic"/>
+                <a:cs typeface="Malgun Gothic"/>
+              </a:rPr>
+              <a:t>•  </a:t>
+            </a:r>
+            <a:r>
+              <a:rPr sz="1400" b="0" i="0">
+                <a:solidFill>
+                  <a:srgbClr val="11202B"/>
+                </a:solidFill>
+                <a:latin typeface="Malgun Gothic"/>
+                <a:ea typeface="Malgun Gothic"/>
+                <a:cs typeface="Malgun Gothic"/>
+              </a:rPr>
+              <a:t>2. </a:t>
+            </a:r>
+            <a:r>
+              <a:rPr sz="1400" b="1" i="0">
+                <a:solidFill>
                   <a:srgbClr val="11202B"/>
                 </a:solidFill>
                 <a:latin typeface="Malgun Gothic"/>
@@ -8122,11 +8209,40 @@
                 <a:ea typeface="Malgun Gothic"/>
                 <a:cs typeface="Malgun Gothic"/>
               </a:rPr>
-              <a:t>: 머리의 구조가 바뀌며 actin 필라멘트를 끌어당긴다. ADP가 떨어진다. 3. </a:t>
-            </a:r>
+              <a:t>: 머리의 구조가 바뀌며 actin 필라멘트를 끌어당긴다. ADP가 떨어진다.</a:t>
+            </a:r>
+          </a:p>
+          <a:p>
+            <a:pPr>
+              <a:spcAft>
+                <a:spcPts val="900"/>
+              </a:spcAft>
+            </a:pPr>
             <a:r>
               <a:rPr sz="1400" b="1" i="0">
                 <a:solidFill>
+                  <a:srgbClr val="F2B705"/>
+                </a:solidFill>
+                <a:latin typeface="Malgun Gothic"/>
+                <a:ea typeface="Malgun Gothic"/>
+                <a:cs typeface="Malgun Gothic"/>
+              </a:rPr>
+              <a:t>•  </a:t>
+            </a:r>
+            <a:r>
+              <a:rPr sz="1400" b="0" i="0">
+                <a:solidFill>
+                  <a:srgbClr val="11202B"/>
+                </a:solidFill>
+                <a:latin typeface="Malgun Gothic"/>
+                <a:ea typeface="Malgun Gothic"/>
+                <a:cs typeface="Malgun Gothic"/>
+              </a:rPr>
+              <a:t>3. </a:t>
+            </a:r>
+            <a:r>
+              <a:rPr sz="1400" b="1" i="0">
+                <a:solidFill>
                   <a:srgbClr val="11202B"/>
                 </a:solidFill>
                 <a:latin typeface="Malgun Gothic"/>
@@ -8144,7 +8260,36 @@
                 <a:ea typeface="Malgun Gothic"/>
                 <a:cs typeface="Malgun Gothic"/>
               </a:rPr>
-              <a:t>: ATP가 머리에 결합하면 actin에 대한 친화도가 떨어져 머리가 떨어진다. 4. </a:t>
+              <a:t>: ATP가 머리에 결합하면 actin에 대한 친화도가 떨어져 머리가 떨어진다.</a:t>
+            </a:r>
+          </a:p>
+          <a:p>
+            <a:pPr>
+              <a:spcAft>
+                <a:spcPts val="900"/>
+              </a:spcAft>
+            </a:pPr>
+            <a:r>
+              <a:rPr sz="1400" b="1" i="0">
+                <a:solidFill>
+                  <a:srgbClr val="F2B705"/>
+                </a:solidFill>
+                <a:latin typeface="Malgun Gothic"/>
+                <a:ea typeface="Malgun Gothic"/>
+                <a:cs typeface="Malgun Gothic"/>
+              </a:rPr>
+              <a:t>•  </a:t>
+            </a:r>
+            <a:r>
+              <a:rPr sz="1400" b="0" i="0">
+                <a:solidFill>
+                  <a:srgbClr val="11202B"/>
+                </a:solidFill>
+                <a:latin typeface="Malgun Gothic"/>
+                <a:ea typeface="Malgun Gothic"/>
+                <a:cs typeface="Malgun Gothic"/>
+              </a:rPr>
+              <a:t>4. </a:t>
             </a:r>
             <a:r>
               <a:rPr sz="1400" b="1" i="0">
@@ -16586,11 +16731,40 @@
                 <a:ea typeface="Malgun Gothic"/>
                 <a:cs typeface="Malgun Gothic"/>
               </a:rPr>
-              <a:t>: 앞쪽에서 actin이 중합해 막을 앞으로 밀어낸다. 2. </a:t>
-            </a:r>
+              <a:t>: 앞쪽에서 actin이 중합해 막을 앞으로 밀어낸다.</a:t>
+            </a:r>
+          </a:p>
+          <a:p>
+            <a:pPr>
+              <a:spcAft>
+                <a:spcPts val="900"/>
+              </a:spcAft>
+            </a:pPr>
             <a:r>
               <a:rPr sz="1400" b="1" i="0">
                 <a:solidFill>
+                  <a:srgbClr val="F2B705"/>
+                </a:solidFill>
+                <a:latin typeface="Malgun Gothic"/>
+                <a:ea typeface="Malgun Gothic"/>
+                <a:cs typeface="Malgun Gothic"/>
+              </a:rPr>
+              <a:t>•  </a:t>
+            </a:r>
+            <a:r>
+              <a:rPr sz="1400" b="0" i="0">
+                <a:solidFill>
+                  <a:srgbClr val="11202B"/>
+                </a:solidFill>
+                <a:latin typeface="Malgun Gothic"/>
+                <a:ea typeface="Malgun Gothic"/>
+                <a:cs typeface="Malgun Gothic"/>
+              </a:rPr>
+              <a:t>2. </a:t>
+            </a:r>
+            <a:r>
+              <a:rPr sz="1400" b="1" i="0">
+                <a:solidFill>
                   <a:srgbClr val="11202B"/>
                 </a:solidFill>
                 <a:latin typeface="Malgun Gothic"/>
@@ -16608,11 +16782,40 @@
                 <a:ea typeface="Malgun Gothic"/>
                 <a:cs typeface="Malgun Gothic"/>
               </a:rPr>
-              <a:t>: 돌출한 부분이 세포외기질에 붙어 발판을 만든다. 3. </a:t>
-            </a:r>
+              <a:t>: 돌출한 부분이 세포외기질에 붙어 발판을 만든다.</a:t>
+            </a:r>
+          </a:p>
+          <a:p>
+            <a:pPr>
+              <a:spcAft>
+                <a:spcPts val="900"/>
+              </a:spcAft>
+            </a:pPr>
             <a:r>
               <a:rPr sz="1400" b="1" i="0">
                 <a:solidFill>
+                  <a:srgbClr val="F2B705"/>
+                </a:solidFill>
+                <a:latin typeface="Malgun Gothic"/>
+                <a:ea typeface="Malgun Gothic"/>
+                <a:cs typeface="Malgun Gothic"/>
+              </a:rPr>
+              <a:t>•  </a:t>
+            </a:r>
+            <a:r>
+              <a:rPr sz="1400" b="0" i="0">
+                <a:solidFill>
+                  <a:srgbClr val="11202B"/>
+                </a:solidFill>
+                <a:latin typeface="Malgun Gothic"/>
+                <a:ea typeface="Malgun Gothic"/>
+                <a:cs typeface="Malgun Gothic"/>
+              </a:rPr>
+              <a:t>3. </a:t>
+            </a:r>
+            <a:r>
+              <a:rPr sz="1400" b="1" i="0">
+                <a:solidFill>
                   <a:srgbClr val="11202B"/>
                 </a:solidFill>
                 <a:latin typeface="Malgun Gothic"/>
@@ -16630,7 +16833,36 @@
                 <a:ea typeface="Malgun Gothic"/>
                 <a:cs typeface="Malgun Gothic"/>
               </a:rPr>
-              <a:t>: myosin II가 세포체를 앞으로 당긴다. 4. </a:t>
+              <a:t>: myosin II가 세포체를 앞으로 당긴다.</a:t>
+            </a:r>
+          </a:p>
+          <a:p>
+            <a:pPr>
+              <a:spcAft>
+                <a:spcPts val="900"/>
+              </a:spcAft>
+            </a:pPr>
+            <a:r>
+              <a:rPr sz="1400" b="1" i="0">
+                <a:solidFill>
+                  <a:srgbClr val="F2B705"/>
+                </a:solidFill>
+                <a:latin typeface="Malgun Gothic"/>
+                <a:ea typeface="Malgun Gothic"/>
+                <a:cs typeface="Malgun Gothic"/>
+              </a:rPr>
+              <a:t>•  </a:t>
+            </a:r>
+            <a:r>
+              <a:rPr sz="1400" b="0" i="0">
+                <a:solidFill>
+                  <a:srgbClr val="11202B"/>
+                </a:solidFill>
+                <a:latin typeface="Malgun Gothic"/>
+                <a:ea typeface="Malgun Gothic"/>
+                <a:cs typeface="Malgun Gothic"/>
+              </a:rPr>
+              <a:t>4. </a:t>
             </a:r>
             <a:r>
               <a:rPr sz="1400" b="1" i="0">

--- a/curriculum/M01/W10/L02/slides.pptx
+++ b/curriculum/M01/W10/L02/slides.pptx
@@ -15262,7 +15262,7 @@
                 <a:ea typeface="Malgun Gothic"/>
                 <a:cs typeface="Malgun Gothic"/>
               </a:rPr>
-              <a:t>M01-W10-L01 미토콘드리아·엽록체·퍼옥시좀 — 소기관이 운반되고 분배되어야 한다는 요구</a:t>
+              <a:t>M01-W10-L01 미토콘드리아·엽록체·퍼옥시좀의 구조와 기능 — 소기관이 운반되고 분배되어야 한다는 요구</a:t>
             </a:r>
           </a:p>
         </p:txBody>
